--- a/learning/P01_zephyr_make_project/slides/P011_CMake缓存与构建排错_Windows.pptx
+++ b/learning/P01_zephyr_make_project/slides/P011_CMake缓存与构建排错_Windows.pptx
@@ -37163,7 +37163,7 @@
                 <a:ea typeface="Microsoft YaHei"/>
                 <a:cs typeface="Microsoft YaHei"/>
               </a:rPr>
-              <a:t>第二次只 </a:t>
+              <a:t xml:space="preserve">第二次只 </a:t>
             </a:r>
             <a:r>
               <a:rPr sz="1950" b="0">
@@ -37185,7 +37185,7 @@
                 <a:ea typeface="Microsoft YaHei"/>
                 <a:cs typeface="Microsoft YaHei"/>
               </a:rPr>
-              <a:t> SDK-B，已有缓存仍可能选择 A。</a:t>
+              <a:t xml:space="preserve"> SDK-B，已有缓存仍可能选择 A。</a:t>
             </a:r>
           </a:p>
           <a:p>
@@ -37214,7 +37214,7 @@
                 <a:ea typeface="Microsoft YaHei"/>
                 <a:cs typeface="Microsoft YaHei"/>
               </a:rPr>
-              <a:t>SDK 标量通过 </a:t>
+              <a:t xml:space="preserve">SDK 标量通过 </a:t>
             </a:r>
             <a:r>
               <a:rPr sz="1950" b="0">
@@ -37236,7 +37236,7 @@
                 <a:ea typeface="Microsoft YaHei"/>
                 <a:cs typeface="Microsoft YaHei"/>
               </a:rPr>
-              <a:t> 读取；本系列简化为缓存、环境、普通值。</a:t>
+              <a:t xml:space="preserve"> 读取；本系列简化为缓存、环境、普通值。</a:t>
             </a:r>
           </a:p>
           <a:p>
@@ -37262,7 +37262,29 @@
                 <a:ea typeface="Microsoft YaHei"/>
                 <a:cs typeface="Microsoft YaHei"/>
               </a:rPr>
-              <a:t>这是具体函数的规则，不能套到所有 CMake 变量。</a:t>
+              <a:t xml:space="preserve">另查 </a:t>
+            </a:r>
+            <a:r>
+              <a:rPr sz="1950" b="0">
+                <a:solidFill>
+                  <a:srgbClr val="B84E00"/>
+                </a:solidFill>
+                <a:latin typeface="Microsoft YaHei"/>
+                <a:ea typeface="Microsoft YaHei"/>
+                <a:cs typeface="Microsoft YaHei"/>
+              </a:rPr>
+              <a:t>Zephyr-sdk_DIR</a:t>
+            </a:r>
+            <a:r>
+              <a:rPr sz="1950" b="0">
+                <a:solidFill>
+                  <a:srgbClr val="29263B"/>
+                </a:solidFill>
+                <a:latin typeface="Microsoft YaHei"/>
+                <a:ea typeface="Microsoft YaHei"/>
+                <a:cs typeface="Microsoft YaHei"/>
+              </a:rPr>
+              <a:t xml:space="preserve"> 包缓存；改 SDK 搜索根不会清掉它。</a:t>
             </a:r>
           </a:p>
           <a:p>
@@ -38725,7 +38747,7 @@
                 <a:ea typeface="Microsoft YaHei"/>
                 <a:cs typeface="Microsoft YaHei"/>
               </a:rPr>
-              <a:t>固定 SDK：约束包位置；换独立工具：选择类型与前缀。</a:t>
+              <a:t>固定 SDK：新构建目录核对包位置；独立工具：选择类型与前缀。</a:t>
             </a:r>
           </a:p>
           <a:p>
@@ -38780,7 +38802,7 @@
                 <a:ea typeface="Microsoft YaHei"/>
                 <a:cs typeface="Microsoft YaHei"/>
               </a:rPr>
-              <a:t>官方板的正常组合可以保留 SDK 默认发现与 </a:t>
+              <a:t xml:space="preserve">官方板的正常组合可以保留 SDK 默认发现与 </a:t>
             </a:r>
             <a:r>
               <a:rPr sz="1950" b="0">
@@ -38802,7 +38824,7 @@
                 <a:ea typeface="Microsoft YaHei"/>
                 <a:cs typeface="Microsoft YaHei"/>
               </a:rPr>
-              <a:t> 模块。</a:t>
+              <a:t xml:space="preserve"> 模块。</a:t>
             </a:r>
           </a:p>
           <a:p>
